--- a/sqlserver-sql/presentation/sqlserver-dql-date-functions.pptx
+++ b/sqlserver-sql/presentation/sqlserver-dql-date-functions.pptx
@@ -7787,7 +7787,7 @@
               <a:rPr sz="1400" dirty="0">
                 <a:latin typeface="Courier"/>
               </a:rPr>
-              <a:t>    SWITCHOFFSET(</a:t>
+              <a:t>    CAST('2024-04-17 15:30:00' AS DATETIME) AT TIME ZONE 'UTC' AT TIME ZONE 'Eastern Standard Time'</a:t>
             </a:r>
             <a:r>
               <a:rPr sz="1400" b="1" dirty="0">
@@ -7796,13 +7796,13 @@
                 </a:solidFill>
                 <a:latin typeface="Courier"/>
               </a:rPr>
-              <a:t>CAST</a:t>
+              <a:t/>
             </a:r>
             <a:r>
               <a:rPr sz="1400" dirty="0">
                 <a:latin typeface="Courier"/>
               </a:rPr>
-              <a:t>(</a:t>
+              <a:t/>
             </a:r>
             <a:r>
               <a:rPr sz="1400" dirty="0">
@@ -7811,148 +7811,148 @@
                 </a:solidFill>
                 <a:latin typeface="Courier"/>
               </a:rPr>
-              <a:t>'2024-04-17 15:30:00'</a:t>
+              <a:t/>
             </a:r>
             <a:r>
               <a:rPr sz="1400" dirty="0">
                 <a:latin typeface="Courier"/>
               </a:rPr>
+              <a:t/>
+            </a:r>
+            <a:r>
+              <a:rPr sz="1400" b="1" dirty="0">
+                <a:solidFill>
+                  <a:srgbClr val="204A87"/>
+                </a:solidFill>
+                <a:latin typeface="Courier"/>
+              </a:rPr>
+              <a:t/>
+            </a:r>
+            <a:r>
+              <a:rPr sz="1400" dirty="0">
+                <a:latin typeface="Courier"/>
+              </a:rPr>
+              <a:t/>
+            </a:r>
+            <a:r>
+              <a:rPr sz="1400" b="1" dirty="0">
+                <a:solidFill>
+                  <a:srgbClr val="204A87"/>
+                </a:solidFill>
+                <a:latin typeface="Courier"/>
+              </a:rPr>
+              <a:t/>
+            </a:r>
+            <a:r>
+              <a:rPr sz="1400" dirty="0">
+                <a:latin typeface="Courier"/>
+              </a:rPr>
+              <a:t/>
+            </a:r>
+            <a:r>
+              <a:rPr sz="1400" dirty="0">
+                <a:solidFill>
+                  <a:srgbClr val="204A87"/>
+                </a:solidFill>
+                <a:latin typeface="Courier"/>
+              </a:rPr>
+              <a:t/>
+            </a:r>
+            <a:r>
+              <a:rPr sz="1400" dirty="0">
+                <a:latin typeface="Courier"/>
+              </a:rPr>
+              <a:t/>
+            </a:r>
+            <a:r>
+              <a:rPr sz="1400" dirty="0">
+                <a:solidFill>
+                  <a:srgbClr val="204A87"/>
+                </a:solidFill>
+                <a:latin typeface="Courier"/>
+              </a:rPr>
+              <a:t/>
+            </a:r>
+            <a:r>
+              <a:rPr sz="1400" dirty="0">
+                <a:latin typeface="Courier"/>
+              </a:rPr>
+              <a:t/>
+            </a:r>
+            <a:r>
+              <a:rPr sz="1400" dirty="0">
+                <a:solidFill>
+                  <a:srgbClr val="4E9A06"/>
+                </a:solidFill>
+                <a:latin typeface="Courier"/>
+              </a:rPr>
+              <a:t/>
+            </a:r>
+            <a:r>
+              <a:rPr sz="1400" dirty="0">
+                <a:latin typeface="Courier"/>
+              </a:rPr>
+              <a:t/>
+            </a:r>
+            <a:r>
+              <a:rPr sz="1400" b="1" dirty="0">
+                <a:solidFill>
+                  <a:srgbClr val="204A87"/>
+                </a:solidFill>
+                <a:latin typeface="Courier"/>
+              </a:rPr>
+              <a:t/>
+            </a:r>
+            <a:r>
+              <a:rPr sz="1400" dirty="0">
+                <a:latin typeface="Courier"/>
+              </a:rPr>
+              <a:t/>
+            </a:r>
+            <a:r>
+              <a:rPr sz="1400" dirty="0">
+                <a:solidFill>
+                  <a:srgbClr val="204A87"/>
+                </a:solidFill>
+                <a:latin typeface="Courier"/>
+              </a:rPr>
+              <a:t/>
+            </a:r>
+            <a:r>
+              <a:rPr sz="1400" dirty="0">
+                <a:latin typeface="Courier"/>
+              </a:rPr>
+              <a:t/>
+            </a:r>
+            <a:r>
+              <a:rPr sz="1400" dirty="0">
+                <a:solidFill>
+                  <a:srgbClr val="204A87"/>
+                </a:solidFill>
+                <a:latin typeface="Courier"/>
+              </a:rPr>
+              <a:t/>
+            </a:r>
+            <a:r>
+              <a:rPr sz="1400" dirty="0">
+                <a:latin typeface="Courier"/>
+              </a:rPr>
+              <a:t/>
+            </a:r>
+            <a:r>
+              <a:rPr sz="1400" dirty="0">
+                <a:solidFill>
+                  <a:srgbClr val="4E9A06"/>
+                </a:solidFill>
+                <a:latin typeface="Courier"/>
+              </a:rPr>
+              <a:t/>
+            </a:r>
+            <a:r>
+              <a:rPr sz="1400" dirty="0">
+                <a:latin typeface="Courier"/>
+              </a:rPr>
               <a:t> </a:t>
-            </a:r>
-            <a:r>
-              <a:rPr sz="1400" b="1" dirty="0">
-                <a:solidFill>
-                  <a:srgbClr val="204A87"/>
-                </a:solidFill>
-                <a:latin typeface="Courier"/>
-              </a:rPr>
-              <a:t>AS</a:t>
-            </a:r>
-            <a:r>
-              <a:rPr sz="1400" dirty="0">
-                <a:latin typeface="Courier"/>
-              </a:rPr>
-              <a:t> DATETIME) </a:t>
-            </a:r>
-            <a:r>
-              <a:rPr sz="1400" b="1" dirty="0">
-                <a:solidFill>
-                  <a:srgbClr val="204A87"/>
-                </a:solidFill>
-                <a:latin typeface="Courier"/>
-              </a:rPr>
-              <a:t>AT</a:t>
-            </a:r>
-            <a:r>
-              <a:rPr sz="1400" dirty="0">
-                <a:latin typeface="Courier"/>
-              </a:rPr>
-              <a:t> </a:t>
-            </a:r>
-            <a:r>
-              <a:rPr sz="1400" dirty="0">
-                <a:solidFill>
-                  <a:srgbClr val="204A87"/>
-                </a:solidFill>
-                <a:latin typeface="Courier"/>
-              </a:rPr>
-              <a:t>TIME</a:t>
-            </a:r>
-            <a:r>
-              <a:rPr sz="1400" dirty="0">
-                <a:latin typeface="Courier"/>
-              </a:rPr>
-              <a:t> </a:t>
-            </a:r>
-            <a:r>
-              <a:rPr sz="1400" dirty="0">
-                <a:solidFill>
-                  <a:srgbClr val="204A87"/>
-                </a:solidFill>
-                <a:latin typeface="Courier"/>
-              </a:rPr>
-              <a:t>ZONE</a:t>
-            </a:r>
-            <a:r>
-              <a:rPr sz="1400" dirty="0">
-                <a:latin typeface="Courier"/>
-              </a:rPr>
-              <a:t> </a:t>
-            </a:r>
-            <a:r>
-              <a:rPr sz="1400" dirty="0">
-                <a:solidFill>
-                  <a:srgbClr val="4E9A06"/>
-                </a:solidFill>
-                <a:latin typeface="Courier"/>
-              </a:rPr>
-              <a:t>'UTC'</a:t>
-            </a:r>
-            <a:r>
-              <a:rPr sz="1400" dirty="0">
-                <a:latin typeface="Courier"/>
-              </a:rPr>
-              <a:t>, DATEPART(TZOFFSET, SYSDATETIMEOFFSET() </a:t>
-            </a:r>
-            <a:r>
-              <a:rPr sz="1400" b="1" dirty="0">
-                <a:solidFill>
-                  <a:srgbClr val="204A87"/>
-                </a:solidFill>
-                <a:latin typeface="Courier"/>
-              </a:rPr>
-              <a:t>AT</a:t>
-            </a:r>
-            <a:r>
-              <a:rPr sz="1400" dirty="0">
-                <a:latin typeface="Courier"/>
-              </a:rPr>
-              <a:t> </a:t>
-            </a:r>
-            <a:r>
-              <a:rPr sz="1400" dirty="0">
-                <a:solidFill>
-                  <a:srgbClr val="204A87"/>
-                </a:solidFill>
-                <a:latin typeface="Courier"/>
-              </a:rPr>
-              <a:t>TIME</a:t>
-            </a:r>
-            <a:r>
-              <a:rPr sz="1400" dirty="0">
-                <a:latin typeface="Courier"/>
-              </a:rPr>
-              <a:t> </a:t>
-            </a:r>
-            <a:r>
-              <a:rPr sz="1400" dirty="0">
-                <a:solidFill>
-                  <a:srgbClr val="204A87"/>
-                </a:solidFill>
-                <a:latin typeface="Courier"/>
-              </a:rPr>
-              <a:t>ZONE</a:t>
-            </a:r>
-            <a:r>
-              <a:rPr sz="1400" dirty="0">
-                <a:latin typeface="Courier"/>
-              </a:rPr>
-              <a:t> </a:t>
-            </a:r>
-            <a:r>
-              <a:rPr sz="1400" dirty="0">
-                <a:solidFill>
-                  <a:srgbClr val="4E9A06"/>
-                </a:solidFill>
-                <a:latin typeface="Courier"/>
-              </a:rPr>
-              <a:t>'Eastern Standard Time'</a:t>
-            </a:r>
-            <a:r>
-              <a:rPr sz="1400" dirty="0">
-                <a:latin typeface="Courier"/>
-              </a:rPr>
-              <a:t>)) </a:t>
             </a:r>
             <a:r>
               <a:rPr sz="1400" b="1" dirty="0">
@@ -7988,7 +7988,7 @@
               <a:rPr sz="1400" dirty="0">
                 <a:latin typeface="Courier"/>
               </a:rPr>
-              <a:t>    SWITCHOFFSET(</a:t>
+              <a:t>    CAST('2024-04-17 15:30:00' AS DATETIME) AT TIME ZONE 'UTC' AT TIME ZONE 'India Standard Time'</a:t>
             </a:r>
             <a:r>
               <a:rPr sz="1400" b="1" dirty="0">
@@ -7997,13 +7997,13 @@
                 </a:solidFill>
                 <a:latin typeface="Courier"/>
               </a:rPr>
-              <a:t>CAST</a:t>
+              <a:t/>
             </a:r>
             <a:r>
               <a:rPr sz="1400" dirty="0">
                 <a:latin typeface="Courier"/>
               </a:rPr>
-              <a:t>(</a:t>
+              <a:t/>
             </a:r>
             <a:r>
               <a:rPr sz="1400" dirty="0">
@@ -8012,148 +8012,148 @@
                 </a:solidFill>
                 <a:latin typeface="Courier"/>
               </a:rPr>
-              <a:t>'2024-04-17 15:30:00'</a:t>
+              <a:t/>
             </a:r>
             <a:r>
               <a:rPr sz="1400" dirty="0">
                 <a:latin typeface="Courier"/>
               </a:rPr>
+              <a:t/>
+            </a:r>
+            <a:r>
+              <a:rPr sz="1400" b="1" dirty="0">
+                <a:solidFill>
+                  <a:srgbClr val="204A87"/>
+                </a:solidFill>
+                <a:latin typeface="Courier"/>
+              </a:rPr>
+              <a:t/>
+            </a:r>
+            <a:r>
+              <a:rPr sz="1400" dirty="0">
+                <a:latin typeface="Courier"/>
+              </a:rPr>
+              <a:t/>
+            </a:r>
+            <a:r>
+              <a:rPr sz="1400" b="1" dirty="0">
+                <a:solidFill>
+                  <a:srgbClr val="204A87"/>
+                </a:solidFill>
+                <a:latin typeface="Courier"/>
+              </a:rPr>
+              <a:t/>
+            </a:r>
+            <a:r>
+              <a:rPr sz="1400" dirty="0">
+                <a:latin typeface="Courier"/>
+              </a:rPr>
+              <a:t/>
+            </a:r>
+            <a:r>
+              <a:rPr sz="1400" dirty="0">
+                <a:solidFill>
+                  <a:srgbClr val="204A87"/>
+                </a:solidFill>
+                <a:latin typeface="Courier"/>
+              </a:rPr>
+              <a:t/>
+            </a:r>
+            <a:r>
+              <a:rPr sz="1400" dirty="0">
+                <a:latin typeface="Courier"/>
+              </a:rPr>
+              <a:t/>
+            </a:r>
+            <a:r>
+              <a:rPr sz="1400" dirty="0">
+                <a:solidFill>
+                  <a:srgbClr val="204A87"/>
+                </a:solidFill>
+                <a:latin typeface="Courier"/>
+              </a:rPr>
+              <a:t/>
+            </a:r>
+            <a:r>
+              <a:rPr sz="1400" dirty="0">
+                <a:latin typeface="Courier"/>
+              </a:rPr>
+              <a:t/>
+            </a:r>
+            <a:r>
+              <a:rPr sz="1400" dirty="0">
+                <a:solidFill>
+                  <a:srgbClr val="4E9A06"/>
+                </a:solidFill>
+                <a:latin typeface="Courier"/>
+              </a:rPr>
+              <a:t/>
+            </a:r>
+            <a:r>
+              <a:rPr sz="1400" dirty="0">
+                <a:latin typeface="Courier"/>
+              </a:rPr>
+              <a:t/>
+            </a:r>
+            <a:r>
+              <a:rPr sz="1400" b="1" dirty="0">
+                <a:solidFill>
+                  <a:srgbClr val="204A87"/>
+                </a:solidFill>
+                <a:latin typeface="Courier"/>
+              </a:rPr>
+              <a:t/>
+            </a:r>
+            <a:r>
+              <a:rPr sz="1400" dirty="0">
+                <a:latin typeface="Courier"/>
+              </a:rPr>
+              <a:t/>
+            </a:r>
+            <a:r>
+              <a:rPr sz="1400" dirty="0">
+                <a:solidFill>
+                  <a:srgbClr val="204A87"/>
+                </a:solidFill>
+                <a:latin typeface="Courier"/>
+              </a:rPr>
+              <a:t/>
+            </a:r>
+            <a:r>
+              <a:rPr sz="1400" dirty="0">
+                <a:latin typeface="Courier"/>
+              </a:rPr>
+              <a:t/>
+            </a:r>
+            <a:r>
+              <a:rPr sz="1400" dirty="0">
+                <a:solidFill>
+                  <a:srgbClr val="204A87"/>
+                </a:solidFill>
+                <a:latin typeface="Courier"/>
+              </a:rPr>
+              <a:t/>
+            </a:r>
+            <a:r>
+              <a:rPr sz="1400" dirty="0">
+                <a:latin typeface="Courier"/>
+              </a:rPr>
+              <a:t/>
+            </a:r>
+            <a:r>
+              <a:rPr sz="1400" dirty="0">
+                <a:solidFill>
+                  <a:srgbClr val="4E9A06"/>
+                </a:solidFill>
+                <a:latin typeface="Courier"/>
+              </a:rPr>
+              <a:t/>
+            </a:r>
+            <a:r>
+              <a:rPr sz="1400" dirty="0">
+                <a:latin typeface="Courier"/>
+              </a:rPr>
               <a:t> </a:t>
-            </a:r>
-            <a:r>
-              <a:rPr sz="1400" b="1" dirty="0">
-                <a:solidFill>
-                  <a:srgbClr val="204A87"/>
-                </a:solidFill>
-                <a:latin typeface="Courier"/>
-              </a:rPr>
-              <a:t>AS</a:t>
-            </a:r>
-            <a:r>
-              <a:rPr sz="1400" dirty="0">
-                <a:latin typeface="Courier"/>
-              </a:rPr>
-              <a:t> DATETIME) </a:t>
-            </a:r>
-            <a:r>
-              <a:rPr sz="1400" b="1" dirty="0">
-                <a:solidFill>
-                  <a:srgbClr val="204A87"/>
-                </a:solidFill>
-                <a:latin typeface="Courier"/>
-              </a:rPr>
-              <a:t>AT</a:t>
-            </a:r>
-            <a:r>
-              <a:rPr sz="1400" dirty="0">
-                <a:latin typeface="Courier"/>
-              </a:rPr>
-              <a:t> </a:t>
-            </a:r>
-            <a:r>
-              <a:rPr sz="1400" dirty="0">
-                <a:solidFill>
-                  <a:srgbClr val="204A87"/>
-                </a:solidFill>
-                <a:latin typeface="Courier"/>
-              </a:rPr>
-              <a:t>TIME</a:t>
-            </a:r>
-            <a:r>
-              <a:rPr sz="1400" dirty="0">
-                <a:latin typeface="Courier"/>
-              </a:rPr>
-              <a:t> </a:t>
-            </a:r>
-            <a:r>
-              <a:rPr sz="1400" dirty="0">
-                <a:solidFill>
-                  <a:srgbClr val="204A87"/>
-                </a:solidFill>
-                <a:latin typeface="Courier"/>
-              </a:rPr>
-              <a:t>ZONE</a:t>
-            </a:r>
-            <a:r>
-              <a:rPr sz="1400" dirty="0">
-                <a:latin typeface="Courier"/>
-              </a:rPr>
-              <a:t> </a:t>
-            </a:r>
-            <a:r>
-              <a:rPr sz="1400" dirty="0">
-                <a:solidFill>
-                  <a:srgbClr val="4E9A06"/>
-                </a:solidFill>
-                <a:latin typeface="Courier"/>
-              </a:rPr>
-              <a:t>'UTC'</a:t>
-            </a:r>
-            <a:r>
-              <a:rPr sz="1400" dirty="0">
-                <a:latin typeface="Courier"/>
-              </a:rPr>
-              <a:t>, DATEPART(TZOFFSET, SYSDATETIMEOFFSET() </a:t>
-            </a:r>
-            <a:r>
-              <a:rPr sz="1400" b="1" dirty="0">
-                <a:solidFill>
-                  <a:srgbClr val="204A87"/>
-                </a:solidFill>
-                <a:latin typeface="Courier"/>
-              </a:rPr>
-              <a:t>AT</a:t>
-            </a:r>
-            <a:r>
-              <a:rPr sz="1400" dirty="0">
-                <a:latin typeface="Courier"/>
-              </a:rPr>
-              <a:t> </a:t>
-            </a:r>
-            <a:r>
-              <a:rPr sz="1400" dirty="0">
-                <a:solidFill>
-                  <a:srgbClr val="204A87"/>
-                </a:solidFill>
-                <a:latin typeface="Courier"/>
-              </a:rPr>
-              <a:t>TIME</a:t>
-            </a:r>
-            <a:r>
-              <a:rPr sz="1400" dirty="0">
-                <a:latin typeface="Courier"/>
-              </a:rPr>
-              <a:t> </a:t>
-            </a:r>
-            <a:r>
-              <a:rPr sz="1400" dirty="0">
-                <a:solidFill>
-                  <a:srgbClr val="204A87"/>
-                </a:solidFill>
-                <a:latin typeface="Courier"/>
-              </a:rPr>
-              <a:t>ZONE</a:t>
-            </a:r>
-            <a:r>
-              <a:rPr sz="1400" dirty="0">
-                <a:latin typeface="Courier"/>
-              </a:rPr>
-              <a:t> </a:t>
-            </a:r>
-            <a:r>
-              <a:rPr sz="1400" dirty="0">
-                <a:solidFill>
-                  <a:srgbClr val="4E9A06"/>
-                </a:solidFill>
-                <a:latin typeface="Courier"/>
-              </a:rPr>
-              <a:t>'India Standard Time'</a:t>
-            </a:r>
-            <a:r>
-              <a:rPr sz="1400" dirty="0">
-                <a:latin typeface="Courier"/>
-              </a:rPr>
-              <a:t>)) </a:t>
             </a:r>
             <a:r>
               <a:rPr sz="1400" b="1" dirty="0">
@@ -9836,7 +9836,7 @@
                 </a:solidFill>
                 <a:latin typeface="Courier"/>
               </a:rPr>
-              <a:t>-- Calculate the age of each employee based on their '</a:t>
+              <a:t>-- Count YEAR boundaries crossed since each employee's hiredate (not exact tenure)</a:t>
             </a:r>
             <a:r>
               <a:rPr lang="en-US" sz="1400" i="1" dirty="0" err="1">
@@ -9845,7 +9845,7 @@
                 </a:solidFill>
                 <a:latin typeface="Courier"/>
               </a:rPr>
-              <a:t>hiredate</a:t>
+              <a:t/>
             </a:r>
             <a:r>
               <a:rPr lang="en-US" sz="1400" i="1" dirty="0">
@@ -9854,7 +9854,7 @@
                 </a:solidFill>
                 <a:latin typeface="Courier"/>
               </a:rPr>
-              <a:t>'</a:t>
+              <a:t/>
             </a:r>
             <a:br>
               <a:rPr lang="en-US" sz="1400" dirty="0"/>
@@ -11235,7 +11235,7 @@
             <a:pPr lvl="0"/>
             <a:r>
               <a:rPr lang="en-US" sz="1800" dirty="0"/>
-              <a:t>Returns the day of the week (0 for Sunday, 1 for Monday, etc.) from a date or timestamp.</a:t>
+              <a:t>Returns the weekday number from a date or timestamp. The numeric mapping depends on SET DATEFIRST and the session language.</a:t>
             </a:r>
           </a:p>
           <a:p>
